--- a/5.1 Quality.pptx
+++ b/5.1 Quality.pptx
@@ -5,10 +5,10 @@
     <p:sldMasterId id="2147483648" r:id="rId4"/>
   </p:sldMasterIdLst>
   <p:notesMasterIdLst>
-    <p:notesMasterId r:id="rId18"/>
+    <p:notesMasterId r:id="rId17"/>
   </p:notesMasterIdLst>
   <p:handoutMasterIdLst>
-    <p:handoutMasterId r:id="rId19"/>
+    <p:handoutMasterId r:id="rId18"/>
   </p:handoutMasterIdLst>
   <p:sldIdLst>
     <p:sldId id="256" r:id="rId5"/>
@@ -19,16 +19,15 @@
     <p:sldId id="274" r:id="rId10"/>
     <p:sldId id="275" r:id="rId11"/>
     <p:sldId id="276" r:id="rId12"/>
-    <p:sldId id="280" r:id="rId13"/>
-    <p:sldId id="277" r:id="rId14"/>
-    <p:sldId id="278" r:id="rId15"/>
-    <p:sldId id="279" r:id="rId16"/>
-    <p:sldId id="261" r:id="rId17"/>
+    <p:sldId id="277" r:id="rId13"/>
+    <p:sldId id="278" r:id="rId14"/>
+    <p:sldId id="279" r:id="rId15"/>
+    <p:sldId id="261" r:id="rId16"/>
   </p:sldIdLst>
   <p:sldSz cx="12192000" cy="6858000"/>
   <p:notesSz cx="6858000" cy="9144000"/>
   <p:custDataLst>
-    <p:tags r:id="rId20"/>
+    <p:tags r:id="rId19"/>
   </p:custDataLst>
   <p:defaultTextStyle>
     <a:defPPr marR="0" lvl="0" algn="l" rtl="0">
@@ -278,7 +277,7 @@
       <p15:notesGuideLst xmlns:p15="http://schemas.microsoft.com/office/powerpoint/2012/main"/>
     </p:ext>
     <p:ext uri="http://customooxmlschemas.google.com/">
-      <go:slidesCustomData xmlns:mc="http://schemas.openxmlformats.org/markup-compatibility/2006" xmlns:mv="urn:schemas-microsoft-com:mac:vml" xmlns:c="http://schemas.openxmlformats.org/drawingml/2006/chart" xmlns:dgm="http://schemas.openxmlformats.org/drawingml/2006/diagram" xmlns:o="urn:schemas-microsoft-com:office:office" xmlns:v="urn:schemas-microsoft-com:vml" xmlns:pvml="urn:schemas-microsoft-com:office:powerpoint" xmlns:com="http://schemas.openxmlformats.org/drawingml/2006/compatibility" xmlns:p14="http://schemas.microsoft.com/office/powerpoint/2010/main" xmlns:p15="http://schemas.microsoft.com/office/powerpoint/2012/main" xmlns:ahyp="http://schemas.microsoft.com/office/drawing/2018/hyperlinkcolor" xmlns:go="http://customooxmlschemas.google.com/" xmlns="" r:id="rId59" roundtripDataSignature="AMtx7mh3YP3xexYcFoahXa2ehi0H5V4Zaw=="/>
+      <go:slidesCustomData xmlns="" xmlns:go="http://customooxmlschemas.google.com/" xmlns:ahyp="http://schemas.microsoft.com/office/drawing/2018/hyperlinkcolor" xmlns:p15="http://schemas.microsoft.com/office/powerpoint/2012/main" xmlns:p14="http://schemas.microsoft.com/office/powerpoint/2010/main" xmlns:com="http://schemas.openxmlformats.org/drawingml/2006/compatibility" xmlns:pvml="urn:schemas-microsoft-com:office:powerpoint" xmlns:v="urn:schemas-microsoft-com:vml" xmlns:o="urn:schemas-microsoft-com:office:office" xmlns:dgm="http://schemas.openxmlformats.org/drawingml/2006/diagram" xmlns:c="http://schemas.openxmlformats.org/drawingml/2006/chart" xmlns:mv="urn:schemas-microsoft-com:mac:vml" xmlns:mc="http://schemas.openxmlformats.org/markup-compatibility/2006" r:id="rId59" roundtripDataSignature="AMtx7mh3YP3xexYcFoahXa2ehi0H5V4Zaw=="/>
     </p:ext>
   </p:extLst>
 </p:presentation>
@@ -386,7 +385,7 @@
           <a:p>
             <a:fld id="{0CBFB8CE-488C-4A7E-87F2-3AF6127C51C1}" type="datetimeFigureOut">
               <a:rPr lang="en-IE" smtClean="0"/>
-              <a:t>28/08/2026</a:t>
+              <a:t>28/09/2026</a:t>
             </a:fld>
             <a:endParaRPr lang="en-IE"/>
           </a:p>
@@ -2491,8 +2490,8 @@
         </p:nvSpPr>
         <p:spPr>
           <a:xfrm>
-            <a:off x="970722" y="1901951"/>
-            <a:ext cx="10515597" cy="4194176"/>
+            <a:off x="970722" y="1371601"/>
+            <a:ext cx="10515597" cy="4724526"/>
           </a:xfrm>
         </p:spPr>
         <p:txBody>
@@ -6211,18 +6210,18 @@
           <a:lstStyle/>
           <a:p>
             <a:r>
-              <a:rPr lang="en-IE" dirty="0"/>
+              <a:rPr lang="en-GB" noProof="0" dirty="0"/>
               <a:t>ESTP Training</a:t>
             </a:r>
           </a:p>
           <a:p>
             <a:r>
-              <a:rPr lang="en-IE" dirty="0"/>
+              <a:rPr lang="en-GB" noProof="0" dirty="0"/>
               <a:t>05-07 October 2026</a:t>
             </a:r>
           </a:p>
           <a:p>
-            <a:endParaRPr lang="en-IE" dirty="0"/>
+            <a:endParaRPr lang="en-GB" noProof="0" dirty="0"/>
           </a:p>
         </p:txBody>
       </p:sp>
@@ -6248,10 +6247,9 @@
           <a:lstStyle/>
           <a:p>
             <a:r>
-              <a:rPr lang="en-GB" dirty="0"/>
+              <a:rPr lang="en-GB" noProof="0" dirty="0"/>
               <a:t>Quality diagnostics in JD+</a:t>
             </a:r>
-            <a:endParaRPr lang="en-IE" dirty="0"/>
           </a:p>
         </p:txBody>
       </p:sp>
@@ -6276,7 +6274,7 @@
           <a:bodyPr/>
           <a:lstStyle/>
           <a:p>
-            <a:endParaRPr lang="en-IE"/>
+            <a:endParaRPr lang="en-GB" noProof="0" dirty="0"/>
           </a:p>
         </p:txBody>
       </p:sp>
@@ -6294,142 +6292,6 @@
 </file>
 
 <file path=ppt/slides/slide10.xml><?xml version="1.0" encoding="utf-8"?>
-<p:sld xmlns:a="http://schemas.openxmlformats.org/drawingml/2006/main" xmlns:r="http://schemas.openxmlformats.org/officeDocument/2006/relationships" xmlns:p="http://schemas.openxmlformats.org/presentationml/2006/main">
-  <p:cSld>
-    <p:spTree>
-      <p:nvGrpSpPr>
-        <p:cNvPr id="1" name="">
-          <a:extLst>
-            <a:ext uri="{FF2B5EF4-FFF2-40B4-BE49-F238E27FC236}">
-              <a16:creationId xmlns:a16="http://schemas.microsoft.com/office/drawing/2014/main" id="{07CE74FE-5A9F-B14F-AF9A-F47FCA61136E}"/>
-            </a:ext>
-          </a:extLst>
-        </p:cNvPr>
-        <p:cNvGrpSpPr/>
-        <p:nvPr/>
-      </p:nvGrpSpPr>
-      <p:grpSpPr>
-        <a:xfrm>
-          <a:off x="0" y="0"/>
-          <a:ext cx="0" cy="0"/>
-          <a:chOff x="0" y="0"/>
-          <a:chExt cx="0" cy="0"/>
-        </a:xfrm>
-      </p:grpSpPr>
-      <p:sp>
-        <p:nvSpPr>
-          <p:cNvPr id="2" name="Titre 1">
-            <a:extLst>
-              <a:ext uri="{FF2B5EF4-FFF2-40B4-BE49-F238E27FC236}">
-                <a16:creationId xmlns:a16="http://schemas.microsoft.com/office/drawing/2014/main" id="{7DBA1E2B-599E-BFE5-FBA1-CF3020A446EC}"/>
-              </a:ext>
-            </a:extLst>
-          </p:cNvPr>
-          <p:cNvSpPr>
-            <a:spLocks noGrp="1"/>
-          </p:cNvSpPr>
-          <p:nvPr>
-            <p:ph type="title"/>
-          </p:nvPr>
-        </p:nvSpPr>
-        <p:spPr/>
-        <p:txBody>
-          <a:bodyPr/>
-          <a:lstStyle/>
-          <a:p>
-            <a:r>
-              <a:rPr lang="fr-BE" dirty="0"/>
-              <a:t>3.4 </a:t>
-            </a:r>
-            <a:r>
-              <a:rPr lang="en-GB" dirty="0"/>
-              <a:t>Residual trading days tests</a:t>
-            </a:r>
-          </a:p>
-        </p:txBody>
-      </p:sp>
-      <p:sp>
-        <p:nvSpPr>
-          <p:cNvPr id="3" name="Espace réservé du contenu 2">
-            <a:extLst>
-              <a:ext uri="{FF2B5EF4-FFF2-40B4-BE49-F238E27FC236}">
-                <a16:creationId xmlns:a16="http://schemas.microsoft.com/office/drawing/2014/main" id="{8BDFCEF7-FAC6-F159-6182-9BD49584FF9B}"/>
-              </a:ext>
-            </a:extLst>
-          </p:cNvPr>
-          <p:cNvSpPr>
-            <a:spLocks noGrp="1"/>
-          </p:cNvSpPr>
-          <p:nvPr>
-            <p:ph idx="1"/>
-          </p:nvPr>
-        </p:nvSpPr>
-        <p:spPr/>
-        <p:txBody>
-          <a:bodyPr/>
-          <a:lstStyle/>
-          <a:p>
-            <a:r>
-              <a:rPr lang="en-GB" dirty="0"/>
-              <a:t>Disabled for quarterly series, rather important for monthly series</a:t>
-            </a:r>
-          </a:p>
-          <a:p>
-            <a:r>
-              <a:rPr lang="en-GB" dirty="0"/>
-              <a:t>F-test on trading days variables </a:t>
-            </a:r>
-          </a:p>
-          <a:p>
-            <a:r>
-              <a:rPr lang="en-GB" dirty="0"/>
-              <a:t>On the SA series</a:t>
-            </a:r>
-          </a:p>
-        </p:txBody>
-      </p:sp>
-      <p:sp>
-        <p:nvSpPr>
-          <p:cNvPr id="5" name="Espace réservé du pied de page 4">
-            <a:extLst>
-              <a:ext uri="{FF2B5EF4-FFF2-40B4-BE49-F238E27FC236}">
-                <a16:creationId xmlns:a16="http://schemas.microsoft.com/office/drawing/2014/main" id="{14F91BD4-A2AF-963F-829B-37CC4E9AB495}"/>
-              </a:ext>
-            </a:extLst>
-          </p:cNvPr>
-          <p:cNvSpPr>
-            <a:spLocks noGrp="1"/>
-          </p:cNvSpPr>
-          <p:nvPr>
-            <p:ph type="ftr" sz="quarter" idx="11"/>
-          </p:nvPr>
-        </p:nvSpPr>
-        <p:spPr/>
-        <p:txBody>
-          <a:bodyPr/>
-          <a:lstStyle/>
-          <a:p>
-            <a:r>
-              <a:rPr lang="en-GB"/>
-              <a:t>Quality diagnostics</a:t>
-            </a:r>
-          </a:p>
-        </p:txBody>
-      </p:sp>
-    </p:spTree>
-    <p:extLst>
-      <p:ext uri="{BB962C8B-B14F-4D97-AF65-F5344CB8AC3E}">
-        <p14:creationId xmlns:p14="http://schemas.microsoft.com/office/powerpoint/2010/main" val="3615481029"/>
-      </p:ext>
-    </p:extLst>
-  </p:cSld>
-  <p:clrMapOvr>
-    <a:masterClrMapping/>
-  </p:clrMapOvr>
-</p:sld>
-</file>
-
-<file path=ppt/slides/slide11.xml><?xml version="1.0" encoding="utf-8"?>
 <p:sld xmlns:a="http://schemas.openxmlformats.org/drawingml/2006/main" xmlns:r="http://schemas.openxmlformats.org/officeDocument/2006/relationships" xmlns:p="http://schemas.openxmlformats.org/presentationml/2006/main">
   <p:cSld>
     <p:spTree>
@@ -6468,18 +6330,9 @@
           <a:lstStyle/>
           <a:p>
             <a:r>
-              <a:rPr lang="fr-BE" dirty="0"/>
-              <a:t>3.51 </a:t>
+              <a:rPr lang="en-GB" noProof="0" dirty="0"/>
+              <a:t>3.51 Seats diagnostics</a:t>
             </a:r>
-            <a:r>
-              <a:rPr lang="fr-BE" dirty="0" err="1"/>
-              <a:t>Seats</a:t>
-            </a:r>
-            <a:r>
-              <a:rPr lang="fr-BE" dirty="0"/>
-              <a:t> diagnostics</a:t>
-            </a:r>
-            <a:endParaRPr lang="en-GB" dirty="0"/>
           </a:p>
         </p:txBody>
       </p:sp>
@@ -6496,7 +6349,7 @@
             <a:spLocks noGrp="1"/>
           </p:cNvSpPr>
           <p:nvPr>
-            <p:ph idx="1"/>
+            <p:ph sz="half" idx="2"/>
           </p:nvPr>
         </p:nvSpPr>
         <p:spPr/>
@@ -6505,42 +6358,42 @@
           <a:lstStyle/>
           <a:p>
             <a:r>
-              <a:rPr lang="en-GB" dirty="0"/>
+              <a:rPr lang="en-GB" sz="2400" noProof="0" dirty="0"/>
               <a:t>Model-based diagnostics</a:t>
             </a:r>
           </a:p>
           <a:p>
             <a:pPr lvl="1"/>
             <a:r>
-              <a:rPr lang="en-GB" dirty="0"/>
+              <a:rPr lang="en-GB" sz="2000" noProof="0" dirty="0"/>
               <a:t>Comparison of the variances of the theoretical estimators of the (stationary) components (seasonal, irregular) and of their estimates</a:t>
             </a:r>
           </a:p>
           <a:p>
             <a:pPr lvl="1"/>
             <a:r>
-              <a:rPr lang="en-GB" dirty="0"/>
+              <a:rPr lang="en-GB" sz="2000" noProof="0" dirty="0"/>
               <a:t>More detailed information available in the interactive module (not used in the diagnostics)</a:t>
             </a:r>
           </a:p>
           <a:p>
             <a:pPr lvl="1"/>
             <a:r>
-              <a:rPr lang="en-GB" dirty="0"/>
+              <a:rPr lang="en-GB" sz="2000" noProof="0" dirty="0"/>
               <a:t>Possible problems when</a:t>
             </a:r>
           </a:p>
           <a:p>
             <a:pPr lvl="2"/>
             <a:r>
-              <a:rPr lang="en-GB" dirty="0"/>
+              <a:rPr lang="en-GB" sz="1800" noProof="0" dirty="0"/>
               <a:t>The ARIMA model is changed by SEATS</a:t>
             </a:r>
           </a:p>
           <a:p>
             <a:pPr lvl="2"/>
             <a:r>
-              <a:rPr lang="en-GB" dirty="0"/>
+              <a:rPr lang="en-GB" sz="1800" noProof="0" dirty="0"/>
               <a:t>The chosen ARIMA model doesn’t fit correctly the data (see also ARIMA residuals)</a:t>
             </a:r>
           </a:p>
@@ -6559,16 +6412,21 @@
             <a:spLocks noGrp="1"/>
           </p:cNvSpPr>
           <p:nvPr>
-            <p:ph type="ftr" sz="quarter" idx="11"/>
+            <p:ph type="ftr" sz="quarter" idx="4294967295"/>
           </p:nvPr>
         </p:nvSpPr>
-        <p:spPr/>
+        <p:spPr>
+          <a:xfrm>
+            <a:off x="0" y="0"/>
+            <a:ext cx="0" cy="0"/>
+          </a:xfrm>
+        </p:spPr>
         <p:txBody>
           <a:bodyPr/>
           <a:lstStyle/>
           <a:p>
             <a:r>
-              <a:rPr lang="en-GB"/>
+              <a:rPr lang="en-GB" noProof="0" dirty="0"/>
               <a:t>Quality diagnostics</a:t>
             </a:r>
           </a:p>
@@ -6587,7 +6445,7 @@
 </p:sld>
 </file>
 
-<file path=ppt/slides/slide12.xml><?xml version="1.0" encoding="utf-8"?>
+<file path=ppt/slides/slide11.xml><?xml version="1.0" encoding="utf-8"?>
 <p:sld xmlns:a="http://schemas.openxmlformats.org/drawingml/2006/main" xmlns:r="http://schemas.openxmlformats.org/officeDocument/2006/relationships" xmlns:p="http://schemas.openxmlformats.org/presentationml/2006/main">
   <p:cSld>
     <p:spTree>
@@ -6626,10 +6484,9 @@
           <a:lstStyle/>
           <a:p>
             <a:r>
-              <a:rPr lang="fr-BE" dirty="0"/>
+              <a:rPr lang="en-GB" noProof="0" dirty="0"/>
               <a:t>3.52 X11 Diagnostics </a:t>
             </a:r>
-            <a:endParaRPr lang="en-GB" dirty="0"/>
           </a:p>
         </p:txBody>
       </p:sp>
@@ -6646,7 +6503,7 @@
             <a:spLocks noGrp="1"/>
           </p:cNvSpPr>
           <p:nvPr>
-            <p:ph idx="1"/>
+            <p:ph sz="half" idx="2"/>
           </p:nvPr>
         </p:nvSpPr>
         <p:spPr/>
@@ -6655,48 +6512,31 @@
           <a:lstStyle/>
           <a:p>
             <a:r>
-              <a:rPr lang="fr-BE" dirty="0"/>
-              <a:t>M-</a:t>
-            </a:r>
-            <a:r>
-              <a:rPr lang="fr-BE" dirty="0" err="1"/>
-              <a:t>Statistics</a:t>
-            </a:r>
-            <a:r>
-              <a:rPr lang="fr-BE" dirty="0"/>
-              <a:t>: global </a:t>
-            </a:r>
-            <a:r>
-              <a:rPr lang="fr-BE" dirty="0" err="1"/>
-              <a:t>indicators</a:t>
-            </a:r>
-            <a:r>
-              <a:rPr lang="fr-BE" dirty="0"/>
-              <a:t> (</a:t>
-            </a:r>
-            <a:r>
-              <a:rPr lang="fr-BE" dirty="0" err="1"/>
-              <a:t>see</a:t>
-            </a:r>
-            <a:r>
-              <a:rPr lang="fr-BE" dirty="0"/>
-              <a:t> Ladiray-Quenneville…)</a:t>
+              <a:rPr lang="en-GB" sz="2400" noProof="0" dirty="0"/>
+              <a:t>M-Statistics: global indicators (see Ladiray-Quenneville…)</a:t>
             </a:r>
           </a:p>
           <a:p>
             <a:pPr lvl="1"/>
             <a:r>
-              <a:rPr lang="fr-BE" dirty="0"/>
+              <a:rPr lang="en-GB" sz="2000" noProof="0" dirty="0"/>
               <a:t>Q</a:t>
             </a:r>
           </a:p>
           <a:p>
             <a:pPr lvl="1"/>
             <a:r>
-              <a:rPr lang="fr-BE" dirty="0"/>
+              <a:rPr lang="en-GB" sz="2000" noProof="0" dirty="0"/>
               <a:t>Q-M2</a:t>
             </a:r>
-            <a:endParaRPr lang="en-GB" dirty="0"/>
+          </a:p>
+          <a:p>
+            <a:pPr lvl="1"/>
+            <a:r>
+              <a:rPr lang="en-GB" sz="2000" noProof="0" dirty="0"/>
+              <a:t>Diagnostics on the  ratios I/C (M3, M5) and I/S (M6) and on the stability of S (M8)</a:t>
+            </a:r>
+            <a:endParaRPr lang="en-GB" noProof="0" dirty="0"/>
           </a:p>
         </p:txBody>
       </p:sp>
@@ -6713,16 +6553,21 @@
             <a:spLocks noGrp="1"/>
           </p:cNvSpPr>
           <p:nvPr>
-            <p:ph type="ftr" sz="quarter" idx="11"/>
+            <p:ph type="ftr" sz="quarter" idx="4294967295"/>
           </p:nvPr>
         </p:nvSpPr>
-        <p:spPr/>
+        <p:spPr>
+          <a:xfrm>
+            <a:off x="0" y="0"/>
+            <a:ext cx="0" cy="0"/>
+          </a:xfrm>
+        </p:spPr>
         <p:txBody>
           <a:bodyPr/>
           <a:lstStyle/>
           <a:p>
             <a:r>
-              <a:rPr lang="en-GB"/>
+              <a:rPr lang="en-GB" noProof="0" dirty="0"/>
               <a:t>Quality diagnostics</a:t>
             </a:r>
           </a:p>
@@ -6741,7 +6586,7 @@
 </p:sld>
 </file>
 
-<file path=ppt/slides/slide13.xml><?xml version="1.0" encoding="utf-8"?>
+<file path=ppt/slides/slide12.xml><?xml version="1.0" encoding="utf-8"?>
 <p:sld xmlns:a="http://schemas.openxmlformats.org/drawingml/2006/main" xmlns:r="http://schemas.openxmlformats.org/officeDocument/2006/relationships" xmlns:p="http://schemas.openxmlformats.org/presentationml/2006/main">
   <p:cSld>
     <p:spTree>
@@ -6779,7 +6624,7 @@
           <a:bodyPr/>
           <a:lstStyle/>
           <a:p>
-            <a:endParaRPr lang="en-IE"/>
+            <a:endParaRPr lang="en-GB" noProof="0" dirty="0"/>
           </a:p>
         </p:txBody>
       </p:sp>
@@ -6804,7 +6649,7 @@
           <a:bodyPr/>
           <a:lstStyle/>
           <a:p>
-            <a:endParaRPr lang="en-IE"/>
+            <a:endParaRPr lang="en-GB" noProof="0" dirty="0"/>
           </a:p>
         </p:txBody>
       </p:sp>
@@ -6860,7 +6705,7 @@
           <a:lstStyle/>
           <a:p>
             <a:r>
-              <a:rPr lang="en-GB" dirty="0"/>
+              <a:rPr lang="en-GB" noProof="0" dirty="0"/>
               <a:t>1. Possible outcomes</a:t>
             </a:r>
           </a:p>
@@ -6879,26 +6724,31 @@
             <a:graphicFrameLocks noGrp="1"/>
           </p:cNvGraphicFramePr>
           <p:nvPr>
-            <p:ph idx="1"/>
+            <p:ph sz="half" idx="2"/>
+            <p:extLst>
+              <p:ext uri="{D42A27DB-BD31-4B8C-83A1-F6EECF244321}">
+                <p14:modId xmlns:p14="http://schemas.microsoft.com/office/powerpoint/2010/main" val="900134614"/>
+              </p:ext>
+            </p:extLst>
           </p:nvPr>
         </p:nvGraphicFramePr>
         <p:xfrm>
-          <a:off x="941832" y="1924018"/>
-          <a:ext cx="7607808" cy="3655822"/>
+          <a:off x="969964" y="1371599"/>
+          <a:ext cx="7727470" cy="4728570"/>
         </p:xfrm>
         <a:graphic>
           <a:graphicData uri="http://schemas.openxmlformats.org/drawingml/2006/table">
             <a:tbl>
               <a:tblPr firstRow="1" firstCol="1" bandRow="1"/>
               <a:tblGrid>
-                <a:gridCol w="1698882">
+                <a:gridCol w="1725603">
                   <a:extLst>
                     <a:ext uri="{9D8B030D-6E8A-4147-A177-3AD203B41FA5}">
                       <a16:colId xmlns:a16="http://schemas.microsoft.com/office/drawing/2014/main" val="2298859349"/>
                     </a:ext>
                   </a:extLst>
                 </a:gridCol>
-                <a:gridCol w="5908926">
+                <a:gridCol w="6001867">
                   <a:extLst>
                     <a:ext uri="{9D8B030D-6E8A-4147-A177-3AD203B41FA5}">
                       <a16:colId xmlns:a16="http://schemas.microsoft.com/office/drawing/2014/main" val="3117818289"/>
@@ -6906,7 +6756,7 @@
                   </a:extLst>
                 </a:gridCol>
               </a:tblGrid>
-              <a:tr h="274502">
+              <a:tr h="384055">
                 <a:tc>
                   <a:txBody>
                     <a:bodyPr/>
@@ -6921,7 +6771,7 @@
                         </a:spcAft>
                       </a:pPr>
                       <a:r>
-                        <a:rPr lang="en-US" sz="1800" b="1" i="1">
+                        <a:rPr lang="en-GB" sz="1800" b="1" i="1" noProof="0" dirty="0">
                           <a:effectLst/>
                           <a:latin typeface="Calibri" panose="020F0502020204030204" pitchFamily="34" charset="0"/>
                           <a:ea typeface="Times New Roman" panose="02020603050405020304" pitchFamily="18" charset="0"/>
@@ -6929,7 +6779,7 @@
                         </a:rPr>
                         <a:t>Value</a:t>
                       </a:r>
-                      <a:endParaRPr lang="en-GB" sz="1800">
+                      <a:endParaRPr lang="en-GB" sz="1800" noProof="0" dirty="0">
                         <a:effectLst/>
                         <a:latin typeface="Calibri" panose="020F0502020204030204" pitchFamily="34" charset="0"/>
                         <a:ea typeface="Times New Roman" panose="02020603050405020304" pitchFamily="18" charset="0"/>
@@ -6991,7 +6841,7 @@
                         </a:spcAft>
                       </a:pPr>
                       <a:r>
-                        <a:rPr lang="en-US" sz="1800" b="1" i="1">
+                        <a:rPr lang="en-GB" sz="1800" b="1" i="1" noProof="0" dirty="0">
                           <a:effectLst/>
                           <a:latin typeface="Calibri" panose="020F0502020204030204" pitchFamily="34" charset="0"/>
                           <a:ea typeface="Times New Roman" panose="02020603050405020304" pitchFamily="18" charset="0"/>
@@ -6999,7 +6849,7 @@
                         </a:rPr>
                         <a:t>Meaning</a:t>
                       </a:r>
-                      <a:endParaRPr lang="en-GB" sz="1800">
+                      <a:endParaRPr lang="en-GB" sz="1800" noProof="0" dirty="0">
                         <a:effectLst/>
                         <a:latin typeface="Calibri" panose="020F0502020204030204" pitchFamily="34" charset="0"/>
                         <a:ea typeface="Times New Roman" panose="02020603050405020304" pitchFamily="18" charset="0"/>
@@ -7053,7 +6903,7 @@
                   </a:ext>
                 </a:extLst>
               </a:tr>
-              <a:tr h="566100">
+              <a:tr h="792092">
                 <a:tc>
                   <a:txBody>
                     <a:bodyPr/>
@@ -7068,7 +6918,7 @@
                         </a:spcAft>
                       </a:pPr>
                       <a:r>
-                        <a:rPr lang="en-US" sz="1800">
+                        <a:rPr lang="en-GB" sz="1800" noProof="0" dirty="0">
                           <a:solidFill>
                             <a:srgbClr val="BFBFBF"/>
                           </a:solidFill>
@@ -7079,7 +6929,7 @@
                         </a:rPr>
                         <a:t>Undefined</a:t>
                       </a:r>
-                      <a:endParaRPr lang="en-GB" sz="1800">
+                      <a:endParaRPr lang="en-GB" sz="1800" noProof="0" dirty="0">
                         <a:effectLst/>
                         <a:latin typeface="Calibri" panose="020F0502020204030204" pitchFamily="34" charset="0"/>
                         <a:ea typeface="Times New Roman" panose="02020603050405020304" pitchFamily="18" charset="0"/>
@@ -7197,7 +7047,7 @@
                   </a:ext>
                 </a:extLst>
               </a:tr>
-              <a:tr h="857698">
+              <a:tr h="1200129">
                 <a:tc>
                   <a:txBody>
                     <a:bodyPr/>
@@ -7212,7 +7062,7 @@
                         </a:spcAft>
                       </a:pPr>
                       <a:r>
-                        <a:rPr lang="en-US" sz="1800" b="1">
+                        <a:rPr lang="en-GB" sz="1800" b="1" noProof="0" dirty="0">
                           <a:effectLst/>
                           <a:latin typeface="Calibri" panose="020F0502020204030204" pitchFamily="34" charset="0"/>
                           <a:ea typeface="Times New Roman" panose="02020603050405020304" pitchFamily="18" charset="0"/>
@@ -7220,7 +7070,7 @@
                         </a:rPr>
                         <a:t>Error</a:t>
                       </a:r>
-                      <a:endParaRPr lang="en-GB" sz="1800">
+                      <a:endParaRPr lang="en-GB" sz="1800" noProof="0" dirty="0">
                         <a:effectLst/>
                         <a:latin typeface="Calibri" panose="020F0502020204030204" pitchFamily="34" charset="0"/>
                         <a:ea typeface="Times New Roman" panose="02020603050405020304" pitchFamily="18" charset="0"/>
@@ -7338,7 +7188,7 @@
                   </a:ext>
                 </a:extLst>
               </a:tr>
-              <a:tr h="566100">
+              <a:tr h="792092">
                 <a:tc>
                   <a:txBody>
                     <a:bodyPr/>
@@ -7353,7 +7203,7 @@
                         </a:spcAft>
                       </a:pPr>
                       <a:r>
-                        <a:rPr lang="en-US" sz="1800" b="1">
+                        <a:rPr lang="en-GB" sz="1800" b="1" noProof="0" dirty="0">
                           <a:solidFill>
                             <a:srgbClr val="FF0000"/>
                           </a:solidFill>
@@ -7364,7 +7214,7 @@
                         </a:rPr>
                         <a:t>Severe</a:t>
                       </a:r>
-                      <a:endParaRPr lang="en-GB" sz="1800">
+                      <a:endParaRPr lang="en-GB" sz="1800" noProof="0" dirty="0">
                         <a:effectLst/>
                         <a:latin typeface="Calibri" panose="020F0502020204030204" pitchFamily="34" charset="0"/>
                         <a:ea typeface="Times New Roman" panose="02020603050405020304" pitchFamily="18" charset="0"/>
@@ -7482,7 +7332,7 @@
                   </a:ext>
                 </a:extLst>
               </a:tr>
-              <a:tr h="566100">
+              <a:tr h="792092">
                 <a:tc>
                   <a:txBody>
                     <a:bodyPr/>
@@ -7497,7 +7347,7 @@
                         </a:spcAft>
                       </a:pPr>
                       <a:r>
-                        <a:rPr lang="en-US" sz="1800">
+                        <a:rPr lang="en-GB" sz="1800" noProof="0" dirty="0">
                           <a:solidFill>
                             <a:srgbClr val="FF0000"/>
                           </a:solidFill>
@@ -7508,7 +7358,7 @@
                         </a:rPr>
                         <a:t>Bad</a:t>
                       </a:r>
-                      <a:endParaRPr lang="en-GB" sz="1800">
+                      <a:endParaRPr lang="en-GB" sz="1800" noProof="0" dirty="0">
                         <a:effectLst/>
                         <a:latin typeface="Calibri" panose="020F0502020204030204" pitchFamily="34" charset="0"/>
                         <a:ea typeface="Times New Roman" panose="02020603050405020304" pitchFamily="18" charset="0"/>
@@ -7626,7 +7476,7 @@
                   </a:ext>
                 </a:extLst>
               </a:tr>
-              <a:tr h="274502">
+              <a:tr h="384055">
                 <a:tc>
                   <a:txBody>
                     <a:bodyPr/>
@@ -7641,7 +7491,7 @@
                         </a:spcAft>
                       </a:pPr>
                       <a:r>
-                        <a:rPr lang="en-US" sz="1800">
+                        <a:rPr lang="en-GB" sz="1800" noProof="0" dirty="0">
                           <a:solidFill>
                             <a:srgbClr val="FFC000"/>
                           </a:solidFill>
@@ -7652,7 +7502,7 @@
                         </a:rPr>
                         <a:t>Uncertain</a:t>
                       </a:r>
-                      <a:endParaRPr lang="en-GB" sz="1800">
+                      <a:endParaRPr lang="en-GB" sz="1800" noProof="0" dirty="0">
                         <a:effectLst/>
                         <a:latin typeface="Calibri" panose="020F0502020204030204" pitchFamily="34" charset="0"/>
                         <a:ea typeface="Times New Roman" panose="02020603050405020304" pitchFamily="18" charset="0"/>
@@ -7770,7 +7620,7 @@
                   </a:ext>
                 </a:extLst>
               </a:tr>
-              <a:tr h="274502">
+              <a:tr h="384055">
                 <a:tc>
                   <a:txBody>
                     <a:bodyPr/>
@@ -7785,7 +7635,7 @@
                         </a:spcAft>
                       </a:pPr>
                       <a:r>
-                        <a:rPr lang="en-US" sz="1800">
+                        <a:rPr lang="en-GB" sz="1800" noProof="0" dirty="0">
                           <a:solidFill>
                             <a:srgbClr val="00B050"/>
                           </a:solidFill>
@@ -7796,7 +7646,7 @@
                         </a:rPr>
                         <a:t>Good</a:t>
                       </a:r>
-                      <a:endParaRPr lang="en-GB" sz="1800">
+                      <a:endParaRPr lang="en-GB" sz="1800" noProof="0" dirty="0">
                         <a:effectLst/>
                         <a:latin typeface="Calibri" panose="020F0502020204030204" pitchFamily="34" charset="0"/>
                         <a:ea typeface="Times New Roman" panose="02020603050405020304" pitchFamily="18" charset="0"/>
@@ -7931,16 +7781,21 @@
             <a:spLocks noGrp="1"/>
           </p:cNvSpPr>
           <p:nvPr>
-            <p:ph type="ftr" sz="quarter" idx="11"/>
+            <p:ph type="ftr" sz="quarter" idx="4294967295"/>
           </p:nvPr>
         </p:nvSpPr>
-        <p:spPr/>
+        <p:spPr>
+          <a:xfrm>
+            <a:off x="0" y="0"/>
+            <a:ext cx="0" cy="0"/>
+          </a:xfrm>
+        </p:spPr>
         <p:txBody>
           <a:bodyPr/>
           <a:lstStyle/>
           <a:p>
             <a:r>
-              <a:rPr lang="en-GB"/>
+              <a:rPr lang="en-GB" noProof="0" dirty="0"/>
               <a:t>Quality diagnostics</a:t>
             </a:r>
           </a:p>
@@ -8030,26 +7885,9 @@
           <a:lstStyle/>
           <a:p>
             <a:r>
-              <a:rPr lang="fr-BE" sz="4000" dirty="0"/>
-              <a:t>1.1 Computation of the global </a:t>
+              <a:rPr lang="en-GB" sz="4000" noProof="0" dirty="0"/>
+              <a:t>1.1 Computation of the global indicator (summary)</a:t>
             </a:r>
-            <a:r>
-              <a:rPr lang="fr-BE" sz="4000" dirty="0" err="1"/>
-              <a:t>indicator</a:t>
-            </a:r>
-            <a:r>
-              <a:rPr lang="fr-BE" sz="4000" dirty="0"/>
-              <a:t> (</a:t>
-            </a:r>
-            <a:r>
-              <a:rPr lang="fr-BE" sz="4000" dirty="0" err="1"/>
-              <a:t>summary</a:t>
-            </a:r>
-            <a:r>
-              <a:rPr lang="fr-BE" sz="4000" dirty="0"/>
-              <a:t>)</a:t>
-            </a:r>
-            <a:endParaRPr lang="en-GB" sz="4000" dirty="0"/>
           </a:p>
         </p:txBody>
       </p:sp>
@@ -8066,26 +7904,31 @@
             <a:graphicFrameLocks noGrp="1"/>
           </p:cNvGraphicFramePr>
           <p:nvPr>
-            <p:ph idx="1"/>
+            <p:ph sz="half" idx="2"/>
+            <p:extLst>
+              <p:ext uri="{D42A27DB-BD31-4B8C-83A1-F6EECF244321}">
+                <p14:modId xmlns:p14="http://schemas.microsoft.com/office/powerpoint/2010/main" val="3223166967"/>
+              </p:ext>
+            </p:extLst>
           </p:nvPr>
         </p:nvGraphicFramePr>
         <p:xfrm>
-          <a:off x="921766" y="1723740"/>
-          <a:ext cx="5849620" cy="4286758"/>
+          <a:off x="969963" y="1371600"/>
+          <a:ext cx="6555549" cy="4578754"/>
         </p:xfrm>
         <a:graphic>
           <a:graphicData uri="http://schemas.openxmlformats.org/drawingml/2006/table">
             <a:tbl>
               <a:tblPr firstRow="1" firstCol="1" bandRow="1"/>
               <a:tblGrid>
-                <a:gridCol w="1329055">
+                <a:gridCol w="1489444">
                   <a:extLst>
                     <a:ext uri="{9D8B030D-6E8A-4147-A177-3AD203B41FA5}">
                       <a16:colId xmlns:a16="http://schemas.microsoft.com/office/drawing/2014/main" val="510482419"/>
                     </a:ext>
                   </a:extLst>
                 </a:gridCol>
-                <a:gridCol w="4520565">
+                <a:gridCol w="5066105">
                   <a:extLst>
                     <a:ext uri="{9D8B030D-6E8A-4147-A177-3AD203B41FA5}">
                       <a16:colId xmlns:a16="http://schemas.microsoft.com/office/drawing/2014/main" val="2560051185"/>
@@ -8093,7 +7936,7 @@
                   </a:extLst>
                 </a:gridCol>
               </a:tblGrid>
-              <a:tr h="0">
+              <a:tr h="448792">
                 <a:tc>
                   <a:txBody>
                     <a:bodyPr/>
@@ -8240,7 +8083,7 @@
                   </a:ext>
                 </a:extLst>
               </a:tr>
-              <a:tr h="0">
+              <a:tr h="448792">
                 <a:tc>
                   <a:txBody>
                     <a:bodyPr/>
@@ -8375,7 +8218,7 @@
                   </a:ext>
                 </a:extLst>
               </a:tr>
-              <a:tr h="0">
+              <a:tr h="448792">
                 <a:tc>
                   <a:txBody>
                     <a:bodyPr/>
@@ -8510,7 +8353,7 @@
                   </a:ext>
                 </a:extLst>
               </a:tr>
-              <a:tr h="0">
+              <a:tr h="448792">
                 <a:tc>
                   <a:txBody>
                     <a:bodyPr/>
@@ -8645,7 +8488,7 @@
                   </a:ext>
                 </a:extLst>
               </a:tr>
-              <a:tr h="0">
+              <a:tr h="925610">
                 <a:tc>
                   <a:txBody>
                     <a:bodyPr/>
@@ -8780,7 +8623,7 @@
                   </a:ext>
                 </a:extLst>
               </a:tr>
-              <a:tr h="0">
+              <a:tr h="925610">
                 <a:tc>
                   <a:txBody>
                     <a:bodyPr/>
@@ -8915,7 +8758,7 @@
                   </a:ext>
                 </a:extLst>
               </a:tr>
-              <a:tr h="0">
+              <a:tr h="925610">
                 <a:tc>
                   <a:txBody>
                     <a:bodyPr/>
@@ -9067,16 +8910,21 @@
             <a:spLocks noGrp="1"/>
           </p:cNvSpPr>
           <p:nvPr>
-            <p:ph type="ftr" sz="quarter" idx="11"/>
+            <p:ph type="ftr" sz="quarter" idx="4294967295"/>
           </p:nvPr>
         </p:nvSpPr>
-        <p:spPr/>
+        <p:spPr>
+          <a:xfrm>
+            <a:off x="0" y="0"/>
+            <a:ext cx="0" cy="0"/>
+          </a:xfrm>
+        </p:spPr>
         <p:txBody>
           <a:bodyPr/>
           <a:lstStyle/>
           <a:p>
             <a:r>
-              <a:rPr lang="en-GB"/>
+              <a:rPr lang="en-GB" noProof="0" dirty="0"/>
               <a:t>Quality diagnostics</a:t>
             </a:r>
           </a:p>
@@ -9096,7 +8944,7 @@
         </p:nvSpPr>
         <p:spPr>
           <a:xfrm>
-            <a:off x="7525512" y="2185415"/>
+            <a:off x="8120935" y="1770745"/>
             <a:ext cx="3520440" cy="2862322"/>
           </a:xfrm>
           <a:prstGeom prst="rect">
@@ -9115,7 +8963,7 @@
               <a:buChar char="•"/>
             </a:pPr>
             <a:r>
-              <a:rPr lang="en-GB" dirty="0"/>
+              <a:rPr lang="en-GB" noProof="0" dirty="0"/>
               <a:t>In most cases, we can’t say that one seasonal adjustment is « better » than another one → NO FIGURE</a:t>
             </a:r>
           </a:p>
@@ -9125,7 +8973,7 @@
               <a:buChar char="•"/>
             </a:pPr>
             <a:r>
-              <a:rPr lang="en-GB" dirty="0"/>
+              <a:rPr lang="en-GB" noProof="0" dirty="0"/>
               <a:t>We even can’t say that a SA is really good</a:t>
             </a:r>
           </a:p>
@@ -9135,12 +8983,12 @@
               <a:buChar char="•"/>
             </a:pPr>
             <a:r>
-              <a:rPr lang="en-GB" dirty="0"/>
+              <a:rPr lang="en-GB" noProof="0" dirty="0"/>
               <a:t>We just can say that there is probably a problem in a given SA (or not)</a:t>
             </a:r>
           </a:p>
           <a:p>
-            <a:endParaRPr lang="en-GB" dirty="0"/>
+            <a:endParaRPr lang="en-GB" noProof="0" dirty="0"/>
           </a:p>
         </p:txBody>
       </p:sp>
@@ -9196,7 +9044,7 @@
           <a:lstStyle/>
           <a:p>
             <a:r>
-              <a:rPr lang="en-GB" dirty="0"/>
+              <a:rPr lang="en-GB" noProof="0" dirty="0"/>
               <a:t>2. Customization of the diagnostics</a:t>
             </a:r>
           </a:p>
@@ -9215,13 +9063,13 @@
             <a:spLocks noGrp="1"/>
           </p:cNvSpPr>
           <p:nvPr>
-            <p:ph idx="1"/>
+            <p:ph sz="half" idx="2"/>
           </p:nvPr>
         </p:nvSpPr>
         <p:spPr>
           <a:xfrm>
-            <a:off x="6096000" y="1825625"/>
-            <a:ext cx="5257800" cy="4351338"/>
+            <a:off x="970723" y="1371601"/>
+            <a:ext cx="4866552" cy="4724526"/>
           </a:xfrm>
         </p:spPr>
         <p:txBody>
@@ -9229,19 +9077,19 @@
           <a:lstStyle/>
           <a:p>
             <a:r>
-              <a:rPr lang="en-GB" dirty="0"/>
+              <a:rPr lang="en-GB" noProof="0" dirty="0"/>
               <a:t>Diagnostics can be enabled/disabled</a:t>
             </a:r>
           </a:p>
           <a:p>
             <a:r>
-              <a:rPr lang="en-GB" dirty="0"/>
+              <a:rPr lang="en-GB" noProof="0" dirty="0"/>
               <a:t>Thresholds can be modified</a:t>
             </a:r>
           </a:p>
           <a:p>
             <a:r>
-              <a:rPr lang="en-GB" dirty="0"/>
+              <a:rPr lang="en-GB" noProof="0" dirty="0"/>
               <a:t>Different diagnostics following the algorithm (new in v3)</a:t>
             </a:r>
           </a:p>
@@ -9260,16 +9108,21 @@
             <a:spLocks noGrp="1"/>
           </p:cNvSpPr>
           <p:nvPr>
-            <p:ph type="ftr" sz="quarter" idx="11"/>
+            <p:ph type="ftr" sz="quarter" idx="4294967295"/>
           </p:nvPr>
         </p:nvSpPr>
-        <p:spPr/>
+        <p:spPr>
+          <a:xfrm>
+            <a:off x="0" y="0"/>
+            <a:ext cx="0" cy="0"/>
+          </a:xfrm>
+        </p:spPr>
         <p:txBody>
           <a:bodyPr/>
           <a:lstStyle/>
           <a:p>
             <a:r>
-              <a:rPr lang="en-GB"/>
+              <a:rPr lang="en-GB" noProof="0" dirty="0"/>
               <a:t>Quality diagnostics</a:t>
             </a:r>
           </a:p>
@@ -9297,8 +9150,8 @@
         </p:blipFill>
         <p:spPr>
           <a:xfrm>
-            <a:off x="1125154" y="1825623"/>
-            <a:ext cx="4366241" cy="4351339"/>
+            <a:off x="6096000" y="1371601"/>
+            <a:ext cx="4664149" cy="4648230"/>
           </a:xfrm>
           <a:prstGeom prst="rect">
             <a:avLst/>
@@ -9357,43 +9210,14 @@
           <a:lstStyle/>
           <a:p>
             <a:r>
-              <a:rPr lang="fr-BE" dirty="0"/>
+              <a:rPr lang="en-GB" noProof="0" dirty="0"/>
               <a:t>3.1 Basic checks</a:t>
             </a:r>
-            <a:endParaRPr lang="en-GB" dirty="0"/>
           </a:p>
         </p:txBody>
       </p:sp>
-      <p:sp>
-        <p:nvSpPr>
-          <p:cNvPr id="5" name="Espace réservé du pied de page 4">
-            <a:extLst>
-              <a:ext uri="{FF2B5EF4-FFF2-40B4-BE49-F238E27FC236}">
-                <a16:creationId xmlns:a16="http://schemas.microsoft.com/office/drawing/2014/main" id="{232D5963-A85D-0026-80B1-22FA3DC54D4B}"/>
-              </a:ext>
-            </a:extLst>
-          </p:cNvPr>
-          <p:cNvSpPr>
-            <a:spLocks noGrp="1"/>
-          </p:cNvSpPr>
-          <p:nvPr>
-            <p:ph type="ftr" sz="quarter" idx="11"/>
-          </p:nvPr>
-        </p:nvSpPr>
-        <p:spPr/>
-        <p:txBody>
-          <a:bodyPr/>
-          <a:lstStyle/>
-          <a:p>
-            <a:r>
-              <a:rPr lang="en-GB"/>
-              <a:t>Quality diagnostics</a:t>
-            </a:r>
-          </a:p>
-        </p:txBody>
-      </p:sp>
-      <mc:AlternateContent xmlns:mc="http://schemas.openxmlformats.org/markup-compatibility/2006" xmlns:a14="http://schemas.microsoft.com/office/drawing/2010/main">
-        <mc:Choice Requires="a14">
+      <mc:AlternateContent xmlns:mc="http://schemas.openxmlformats.org/markup-compatibility/2006">
+        <mc:Choice xmlns:a14="http://schemas.microsoft.com/office/drawing/2010/main" Requires="a14">
           <p:sp>
             <p:nvSpPr>
               <p:cNvPr id="13" name="Espace réservé du contenu 12">
@@ -9407,23 +9231,28 @@
                 <a:spLocks noGrp="1"/>
               </p:cNvSpPr>
               <p:nvPr>
-                <p:ph idx="1"/>
+                <p:ph sz="half" idx="2"/>
               </p:nvPr>
             </p:nvSpPr>
-            <p:spPr/>
+            <p:spPr>
+              <a:xfrm>
+                <a:off x="970722" y="1371601"/>
+                <a:ext cx="9566143" cy="4688957"/>
+              </a:xfrm>
+            </p:spPr>
             <p:txBody>
               <a:bodyPr/>
               <a:lstStyle/>
               <a:p>
                 <a:r>
-                  <a:rPr lang="fr-BE" dirty="0"/>
+                  <a:rPr lang="en-GB" sz="2400" noProof="0" dirty="0"/>
                   <a:t>Definition</a:t>
                 </a:r>
               </a:p>
               <a:p>
                 <a:pPr lvl="1"/>
                 <a:r>
-                  <a:rPr lang="en-US" dirty="0">
+                  <a:rPr lang="en-GB" sz="2000" noProof="0" dirty="0">
                     <a:effectLst/>
                     <a:latin typeface="Calibri" panose="020F0502020204030204" pitchFamily="34" charset="0"/>
                     <a:ea typeface="Times New Roman" panose="02020603050405020304" pitchFamily="18" charset="0"/>
@@ -9440,7 +9269,7 @@
                       <m:rPr>
                         <m:sty m:val="p"/>
                       </m:rPr>
-                      <a:rPr lang="fr-BE" b="0" i="0" smtClean="0">
+                      <a:rPr lang="en-GB" sz="1800" b="0" i="0" noProof="0" smtClean="0">
                         <a:effectLst/>
                         <a:latin typeface="Cambria Math" panose="02040503050406030204" pitchFamily="18" charset="0"/>
                         <a:ea typeface="Times New Roman" panose="02020603050405020304" pitchFamily="18" charset="0"/>
@@ -9449,7 +9278,7 @@
                       <m:t>Y</m:t>
                     </m:r>
                     <m:r>
-                      <a:rPr lang="fr-BE" b="0" i="1" smtClean="0">
+                      <a:rPr lang="en-GB" sz="1800" b="0" i="1" noProof="0" smtClean="0">
                         <a:effectLst/>
                         <a:latin typeface="Cambria Math" panose="02040503050406030204" pitchFamily="18" charset="0"/>
                         <a:ea typeface="Times New Roman" panose="02020603050405020304" pitchFamily="18" charset="0"/>
@@ -9458,7 +9287,7 @@
                       <m:t>=</m:t>
                     </m:r>
                     <m:r>
-                      <a:rPr lang="fr-BE" b="0" i="1" smtClean="0">
+                      <a:rPr lang="en-GB" sz="1800" b="0" i="1" noProof="0" smtClean="0">
                         <a:effectLst/>
                         <a:latin typeface="Cambria Math" panose="02040503050406030204" pitchFamily="18" charset="0"/>
                         <a:ea typeface="Times New Roman" panose="02020603050405020304" pitchFamily="18" charset="0"/>
@@ -9467,7 +9296,7 @@
                       <m:t>𝑇</m:t>
                     </m:r>
                     <m:r>
-                      <a:rPr lang="fr-BE" b="0" i="1" smtClean="0">
+                      <a:rPr lang="en-GB" sz="1800" b="0" i="1" noProof="0" smtClean="0">
                         <a:effectLst/>
                         <a:latin typeface="Cambria Math" panose="02040503050406030204" pitchFamily="18" charset="0"/>
                         <a:ea typeface="Times New Roman" panose="02020603050405020304" pitchFamily="18" charset="0"/>
@@ -9476,7 +9305,7 @@
                       <m:t>∗</m:t>
                     </m:r>
                     <m:r>
-                      <a:rPr lang="fr-BE" b="0" i="1" smtClean="0">
+                      <a:rPr lang="en-GB" sz="1800" b="0" i="1" noProof="0" smtClean="0">
                         <a:effectLst/>
                         <a:latin typeface="Cambria Math" panose="02040503050406030204" pitchFamily="18" charset="0"/>
                         <a:ea typeface="Times New Roman" panose="02020603050405020304" pitchFamily="18" charset="0"/>
@@ -9485,7 +9314,7 @@
                       <m:t>𝑆</m:t>
                     </m:r>
                     <m:r>
-                      <a:rPr lang="fr-BE" b="0" i="1" smtClean="0">
+                      <a:rPr lang="en-GB" sz="1800" b="0" i="1" noProof="0" smtClean="0">
                         <a:effectLst/>
                         <a:latin typeface="Cambria Math" panose="02040503050406030204" pitchFamily="18" charset="0"/>
                         <a:ea typeface="Times New Roman" panose="02020603050405020304" pitchFamily="18" charset="0"/>
@@ -9494,7 +9323,7 @@
                       <m:t>∗</m:t>
                     </m:r>
                     <m:r>
-                      <a:rPr lang="fr-BE" b="0" i="1" smtClean="0">
+                      <a:rPr lang="en-GB" sz="1800" b="0" i="1" noProof="0" smtClean="0">
                         <a:effectLst/>
                         <a:latin typeface="Cambria Math" panose="02040503050406030204" pitchFamily="18" charset="0"/>
                         <a:ea typeface="Times New Roman" panose="02020603050405020304" pitchFamily="18" charset="0"/>
@@ -9504,7 +9333,7 @@
                     </m:r>
                   </m:oMath>
                 </a14:m>
-                <a:endParaRPr lang="fr-BE" b="0" i="1" dirty="0">
+                <a:endParaRPr lang="en-GB" sz="1800" b="0" i="1" noProof="0" dirty="0">
                   <a:effectLst/>
                   <a:latin typeface="Cambria Math" panose="02040503050406030204" pitchFamily="18" charset="0"/>
                   <a:ea typeface="Times New Roman" panose="02020603050405020304" pitchFamily="18" charset="0"/>
@@ -9516,7 +9345,7 @@
                 <a14:m>
                   <m:oMath xmlns:m="http://schemas.openxmlformats.org/officeDocument/2006/math">
                     <m:r>
-                      <a:rPr lang="fr-BE" b="0" i="1" smtClean="0">
+                      <a:rPr lang="en-GB" sz="1800" b="0" i="1" noProof="0" smtClean="0">
                         <a:effectLst/>
                         <a:latin typeface="Cambria Math" panose="02040503050406030204" pitchFamily="18" charset="0"/>
                         <a:ea typeface="Times New Roman" panose="02020603050405020304" pitchFamily="18" charset="0"/>
@@ -9526,54 +9355,54 @@
                     </m:r>
                   </m:oMath>
                 </a14:m>
-                <a:endParaRPr lang="en-GB" dirty="0"/>
+                <a:endParaRPr lang="en-GB" sz="1800" noProof="0" dirty="0"/>
               </a:p>
               <a:p>
                 <a:pPr lvl="1"/>
                 <a:r>
-                  <a:rPr lang="en-GB" dirty="0"/>
+                  <a:rPr lang="en-GB" sz="2000" noProof="0" dirty="0"/>
                   <a:t>Error → Bug in the software (→ </a:t>
                 </a:r>
                 <a:r>
-                  <a:rPr lang="en-GB" dirty="0" err="1"/>
+                  <a:rPr lang="en-GB" sz="2000" noProof="0" dirty="0" err="1"/>
                   <a:t>github</a:t>
                 </a:r>
                 <a:r>
-                  <a:rPr lang="en-GB" dirty="0"/>
+                  <a:rPr lang="en-GB" sz="2000" noProof="0" dirty="0"/>
                   <a:t>)</a:t>
                 </a:r>
               </a:p>
               <a:p>
                 <a:r>
-                  <a:rPr lang="en-GB" dirty="0"/>
+                  <a:rPr lang="en-GB" sz="2400" noProof="0" dirty="0"/>
                   <a:t>Annual totals</a:t>
                 </a:r>
               </a:p>
               <a:p>
                 <a:pPr lvl="1"/>
                 <a:r>
-                  <a:rPr lang="en-GB" dirty="0"/>
+                  <a:rPr lang="en-GB" sz="2000" noProof="0" dirty="0"/>
                   <a:t>Comparison of the annuals totals of the original series and those of the seasonally adjusted series </a:t>
                 </a:r>
               </a:p>
               <a:p>
                 <a:pPr lvl="1"/>
                 <a:r>
-                  <a:rPr lang="en-GB" dirty="0"/>
+                  <a:rPr lang="en-GB" sz="2000" noProof="0" dirty="0"/>
                   <a:t>Error ≡ not an actual bug, but an unacceptable result (→ additive decomposition, benchmarking)</a:t>
                 </a:r>
               </a:p>
               <a:p>
                 <a:pPr lvl="1"/>
-                <a:endParaRPr lang="en-GB" dirty="0"/>
+                <a:endParaRPr lang="en-GB" noProof="0" dirty="0"/>
               </a:p>
               <a:p>
-                <a:endParaRPr lang="en-GB" dirty="0"/>
+                <a:endParaRPr lang="en-GB" noProof="0" dirty="0"/>
               </a:p>
             </p:txBody>
           </p:sp>
         </mc:Choice>
-        <mc:Fallback xmlns="">
+        <mc:Fallback>
           <p:sp>
             <p:nvSpPr>
               <p:cNvPr id="13" name="Espace réservé du contenu 12">
@@ -9587,14 +9416,18 @@
                 <a:spLocks noGrp="1" noRot="1" noChangeAspect="1" noMove="1" noResize="1" noEditPoints="1" noAdjustHandles="1" noChangeArrowheads="1" noChangeShapeType="1" noTextEdit="1"/>
               </p:cNvSpPr>
               <p:nvPr>
-                <p:ph idx="1"/>
+                <p:ph sz="half" idx="2"/>
               </p:nvPr>
             </p:nvSpPr>
             <p:spPr>
+              <a:xfrm>
+                <a:off x="970722" y="1371601"/>
+                <a:ext cx="9566143" cy="4688957"/>
+              </a:xfrm>
               <a:blipFill>
                 <a:blip r:embed="rId2"/>
                 <a:stretch>
-                  <a:fillRect l="-1043" t="-2241" b="-140"/>
+                  <a:fillRect l="-829" t="-1691"/>
                 </a:stretch>
               </a:blipFill>
             </p:spPr>
@@ -9613,6 +9446,39 @@
           </p:sp>
         </mc:Fallback>
       </mc:AlternateContent>
+      <p:sp>
+        <p:nvSpPr>
+          <p:cNvPr id="5" name="Espace réservé du pied de page 4">
+            <a:extLst>
+              <a:ext uri="{FF2B5EF4-FFF2-40B4-BE49-F238E27FC236}">
+                <a16:creationId xmlns:a16="http://schemas.microsoft.com/office/drawing/2014/main" id="{232D5963-A85D-0026-80B1-22FA3DC54D4B}"/>
+              </a:ext>
+            </a:extLst>
+          </p:cNvPr>
+          <p:cNvSpPr>
+            <a:spLocks noGrp="1"/>
+          </p:cNvSpPr>
+          <p:nvPr>
+            <p:ph type="ftr" sz="quarter" idx="4294967295"/>
+          </p:nvPr>
+        </p:nvSpPr>
+        <p:spPr>
+          <a:xfrm>
+            <a:off x="0" y="0"/>
+            <a:ext cx="0" cy="0"/>
+          </a:xfrm>
+        </p:spPr>
+        <p:txBody>
+          <a:bodyPr/>
+          <a:lstStyle/>
+          <a:p>
+            <a:r>
+              <a:rPr lang="en-GB" noProof="0" dirty="0"/>
+              <a:t>Quality diagnostics</a:t>
+            </a:r>
+          </a:p>
+        </p:txBody>
+      </p:sp>
     </p:spTree>
     <p:extLst>
       <p:ext uri="{BB962C8B-B14F-4D97-AF65-F5344CB8AC3E}">
@@ -9665,14 +9531,17 @@
           <a:lstStyle/>
           <a:p>
             <a:r>
-              <a:rPr lang="fr-BE" dirty="0"/>
-              <a:t>3.21 Modeling: REGARIMA </a:t>
+              <a:rPr lang="en-GB" noProof="0" dirty="0"/>
+              <a:t>3.21 </a:t>
             </a:r>
             <a:r>
-              <a:rPr lang="fr-BE" dirty="0" err="1"/>
-              <a:t>residuals</a:t>
+              <a:rPr lang="en-GB" noProof="0" dirty="0" err="1"/>
+              <a:t>Modeling</a:t>
             </a:r>
-            <a:endParaRPr lang="en-GB" dirty="0"/>
+            <a:r>
+              <a:rPr lang="en-GB" noProof="0" dirty="0"/>
+              <a:t>: REGARIMA residuals</a:t>
+            </a:r>
           </a:p>
         </p:txBody>
       </p:sp>
@@ -9689,7 +9558,7 @@
             <a:spLocks noGrp="1"/>
           </p:cNvSpPr>
           <p:nvPr>
-            <p:ph idx="1"/>
+            <p:ph sz="half" idx="2"/>
           </p:nvPr>
         </p:nvSpPr>
         <p:spPr/>
@@ -9698,82 +9567,66 @@
           <a:lstStyle/>
           <a:p>
             <a:r>
-              <a:rPr lang="en-GB" dirty="0"/>
+              <a:rPr lang="en-GB" sz="2400" noProof="0" dirty="0"/>
               <a:t>Various NIID tests on the residuals of the REGARIMA pre-processing.</a:t>
             </a:r>
           </a:p>
           <a:p>
             <a:pPr lvl="1"/>
             <a:r>
-              <a:rPr lang="en-GB" dirty="0"/>
-              <a:t>Normality (</a:t>
-            </a:r>
-            <a:r>
-              <a:rPr lang="en-GB" dirty="0" err="1"/>
-              <a:t>Doornik</a:t>
-            </a:r>
-            <a:r>
-              <a:rPr lang="en-GB" dirty="0"/>
-              <a:t>-Hansen)</a:t>
+              <a:rPr lang="en-GB" sz="2000" noProof="0" dirty="0"/>
+              <a:t>Normality (Doornik-Hansen)</a:t>
             </a:r>
           </a:p>
           <a:p>
             <a:pPr lvl="1"/>
             <a:r>
-              <a:rPr lang="en-GB" dirty="0"/>
-              <a:t>Independence (</a:t>
-            </a:r>
-            <a:r>
-              <a:rPr lang="en-GB" dirty="0" err="1"/>
-              <a:t>Ljung</a:t>
-            </a:r>
-            <a:r>
-              <a:rPr lang="en-GB" dirty="0"/>
-              <a:t>-Box)</a:t>
+              <a:rPr lang="en-GB" sz="2000" noProof="0" dirty="0"/>
+              <a:t>Independence (Ljung-Box)</a:t>
             </a:r>
           </a:p>
           <a:p>
             <a:pPr lvl="1"/>
             <a:r>
-              <a:rPr lang="en-GB" dirty="0"/>
+              <a:rPr lang="en-GB" sz="2000" noProof="0" dirty="0"/>
               <a:t>Spectral TD (periodogram). </a:t>
             </a:r>
           </a:p>
           <a:p>
             <a:pPr lvl="1"/>
             <a:r>
-              <a:rPr lang="en-GB" dirty="0"/>
+              <a:rPr lang="en-GB" sz="2000" noProof="0" dirty="0"/>
               <a:t>Spectral Seas (periodogram)</a:t>
             </a:r>
           </a:p>
           <a:p>
             <a:r>
-              <a:rPr lang="en-GB" dirty="0"/>
+              <a:rPr lang="en-GB" sz="2400" noProof="0" dirty="0"/>
               <a:t>Should not be overstated</a:t>
             </a:r>
           </a:p>
           <a:p>
             <a:pPr lvl="1"/>
             <a:r>
-              <a:rPr lang="en-GB" dirty="0"/>
+              <a:rPr lang="en-GB" sz="2000" noProof="0" dirty="0"/>
               <a:t>especially normality, independence</a:t>
             </a:r>
           </a:p>
           <a:p>
             <a:pPr lvl="1"/>
             <a:r>
-              <a:rPr lang="en-GB" dirty="0"/>
+              <a:rPr lang="en-GB" sz="2000" noProof="0" dirty="0"/>
               <a:t>especially for X12</a:t>
             </a:r>
           </a:p>
           <a:p>
             <a:r>
-              <a:rPr lang="en-GB" dirty="0"/>
+              <a:rPr lang="en-GB" sz="2400" noProof="0" dirty="0"/>
               <a:t>Show possible problems in the decomposition part.</a:t>
             </a:r>
           </a:p>
           <a:p>
-            <a:endParaRPr lang="en-GB" dirty="0"/>
+            <a:endParaRPr lang="en-GB" noProof="0" dirty="0"/>
           </a:p>
         </p:txBody>
       </p:sp>
@@ -9790,16 +9643,21 @@
             <a:spLocks noGrp="1"/>
           </p:cNvSpPr>
           <p:nvPr>
-            <p:ph type="ftr" sz="quarter" idx="11"/>
+            <p:ph type="ftr" sz="quarter" idx="4294967295"/>
           </p:nvPr>
         </p:nvSpPr>
-        <p:spPr/>
+        <p:spPr>
+          <a:xfrm>
+            <a:off x="0" y="0"/>
+            <a:ext cx="0" cy="0"/>
+          </a:xfrm>
+        </p:spPr>
         <p:txBody>
           <a:bodyPr/>
           <a:lstStyle/>
           <a:p>
             <a:r>
-              <a:rPr lang="en-GB"/>
+              <a:rPr lang="en-GB" noProof="0" dirty="0"/>
               <a:t>Quality diagnostics</a:t>
             </a:r>
           </a:p>
@@ -9851,35 +9709,33 @@
             <p:ph type="title"/>
           </p:nvPr>
         </p:nvSpPr>
-        <p:spPr/>
+        <p:spPr>
+          <a:xfrm>
+            <a:off x="350874" y="413590"/>
+            <a:ext cx="11135448" cy="782357"/>
+          </a:xfrm>
+        </p:spPr>
         <p:txBody>
           <a:bodyPr/>
           <a:lstStyle/>
           <a:p>
             <a:r>
-              <a:rPr lang="fr-BE" dirty="0"/>
-              <a:t>3.22 Modeling:</a:t>
+              <a:rPr lang="en-GB" noProof="0" dirty="0"/>
+              <a:t>3.22 </a:t>
             </a:r>
-            <a:br>
-              <a:rPr lang="fr-BE" dirty="0"/>
-            </a:br>
             <a:r>
-              <a:rPr lang="fr-BE" dirty="0" err="1"/>
+              <a:rPr lang="en-GB" noProof="0" dirty="0" err="1"/>
+              <a:t>Modeling:</a:t>
+            </a:r>
+            <a:r>
+              <a:rPr lang="en-GB" sz="3600" noProof="0" dirty="0" err="1"/>
               <a:t>Outliers</a:t>
             </a:r>
             <a:r>
-              <a:rPr lang="fr-BE" dirty="0"/>
-              <a:t>, out-of-</a:t>
+              <a:rPr lang="en-GB" sz="3600" noProof="0" dirty="0"/>
+              <a:t>, out-of-sample diagnostics</a:t>
             </a:r>
-            <a:r>
-              <a:rPr lang="fr-BE" dirty="0" err="1"/>
-              <a:t>sample</a:t>
-            </a:r>
-            <a:r>
-              <a:rPr lang="fr-BE" dirty="0"/>
-              <a:t> diagnostics</a:t>
-            </a:r>
-            <a:endParaRPr lang="en-GB" dirty="0"/>
+            <a:endParaRPr lang="en-GB" noProof="0" dirty="0"/>
           </a:p>
         </p:txBody>
       </p:sp>
@@ -9896,7 +9752,7 @@
             <a:spLocks noGrp="1"/>
           </p:cNvSpPr>
           <p:nvPr>
-            <p:ph idx="1"/>
+            <p:ph sz="half" idx="2"/>
           </p:nvPr>
         </p:nvSpPr>
         <p:spPr/>
@@ -9905,35 +9761,27 @@
           <a:lstStyle/>
           <a:p>
             <a:r>
-              <a:rPr lang="en-GB" dirty="0"/>
+              <a:rPr lang="en-GB" sz="2400" noProof="0" dirty="0"/>
               <a:t>Should we accept a series with many outliers ?</a:t>
             </a:r>
           </a:p>
           <a:p>
             <a:r>
-              <a:rPr lang="en-GB" dirty="0"/>
+              <a:rPr lang="en-GB" sz="2400" noProof="0" dirty="0"/>
               <a:t>Should we accept a model that provides biased/bad forecasts (mean/variance) at the end of the series ?</a:t>
             </a:r>
           </a:p>
           <a:p>
             <a:r>
-              <a:rPr lang="en-GB" dirty="0"/>
-              <a:t>Not enabled by default, but used for model selection in </a:t>
+              <a:rPr lang="en-GB" sz="2400" noProof="0" dirty="0"/>
+              <a:t>Not enabled by default, but used for model selection in Tramo (AMI)</a:t>
             </a:r>
-            <a:r>
-              <a:rPr lang="en-GB" dirty="0" err="1"/>
-              <a:t>Tramo</a:t>
-            </a:r>
-            <a:r>
-              <a:rPr lang="en-GB" dirty="0"/>
-              <a:t> (AMI)</a:t>
-            </a:r>
           </a:p>
           <a:p>
             <a:pPr marL="0" indent="0">
               <a:buNone/>
             </a:pPr>
-            <a:endParaRPr lang="en-GB" dirty="0"/>
+            <a:endParaRPr lang="en-GB" noProof="0" dirty="0"/>
           </a:p>
         </p:txBody>
       </p:sp>
@@ -9950,16 +9798,21 @@
             <a:spLocks noGrp="1"/>
           </p:cNvSpPr>
           <p:nvPr>
-            <p:ph type="ftr" sz="quarter" idx="11"/>
+            <p:ph type="ftr" sz="quarter" idx="4294967295"/>
           </p:nvPr>
         </p:nvSpPr>
-        <p:spPr/>
+        <p:spPr>
+          <a:xfrm>
+            <a:off x="0" y="0"/>
+            <a:ext cx="0" cy="0"/>
+          </a:xfrm>
+        </p:spPr>
         <p:txBody>
           <a:bodyPr/>
           <a:lstStyle/>
           <a:p>
             <a:r>
-              <a:rPr lang="en-GB"/>
+              <a:rPr lang="en-GB" noProof="0" dirty="0"/>
               <a:t>Quality diagnostics</a:t>
             </a:r>
           </a:p>
@@ -10017,12 +9870,8 @@
           <a:lstStyle/>
           <a:p>
             <a:r>
-              <a:rPr lang="fr-BE" dirty="0"/>
-              <a:t>3.31 </a:t>
-            </a:r>
-            <a:r>
-              <a:rPr lang="en-GB" dirty="0"/>
-              <a:t>Residual seasonality tests</a:t>
+              <a:rPr lang="en-GB" noProof="0" dirty="0"/>
+              <a:t>3.3 Residual seasonality tests</a:t>
             </a:r>
           </a:p>
         </p:txBody>
@@ -10040,7 +9889,7 @@
             <a:spLocks noGrp="1"/>
           </p:cNvSpPr>
           <p:nvPr>
-            <p:ph idx="1"/>
+            <p:ph sz="half" idx="2"/>
           </p:nvPr>
         </p:nvSpPr>
         <p:spPr/>
@@ -10049,24 +9898,24 @@
           <a:lstStyle/>
           <a:p>
             <a:r>
-              <a:rPr lang="en-GB" dirty="0"/>
+              <a:rPr lang="en-GB" sz="2400" noProof="0" dirty="0"/>
               <a:t>Most important test</a:t>
             </a:r>
           </a:p>
           <a:p>
             <a:r>
-              <a:rPr lang="en-GB" dirty="0"/>
+              <a:rPr lang="en-GB" sz="2400" noProof="0" dirty="0"/>
               <a:t>Qs test and F-test on seasonal dummies (last 12 years)</a:t>
             </a:r>
           </a:p>
           <a:p>
             <a:r>
-              <a:rPr lang="en-GB" dirty="0"/>
-              <a:t>On the SA series and on the irregular component (sufficiently large)</a:t>
+              <a:rPr lang="en-GB" sz="2400" noProof="0" dirty="0"/>
+              <a:t>On the SA series and on the irregular component (not computed on very small irregular)</a:t>
             </a:r>
           </a:p>
           <a:p>
-            <a:endParaRPr lang="en-GB" dirty="0"/>
+            <a:endParaRPr lang="en-GB" noProof="0" dirty="0"/>
           </a:p>
         </p:txBody>
       </p:sp>
@@ -10083,16 +9932,21 @@
             <a:spLocks noGrp="1"/>
           </p:cNvSpPr>
           <p:nvPr>
-            <p:ph type="ftr" sz="quarter" idx="11"/>
+            <p:ph type="ftr" sz="quarter" idx="4294967295"/>
           </p:nvPr>
         </p:nvSpPr>
-        <p:spPr/>
+        <p:spPr>
+          <a:xfrm>
+            <a:off x="0" y="0"/>
+            <a:ext cx="0" cy="0"/>
+          </a:xfrm>
+        </p:spPr>
         <p:txBody>
           <a:bodyPr/>
           <a:lstStyle/>
           <a:p>
             <a:r>
-              <a:rPr lang="en-GB"/>
+              <a:rPr lang="en-GB" noProof="0" dirty="0"/>
               <a:t>Quality diagnostics</a:t>
             </a:r>
           </a:p>
@@ -10119,7 +9973,7 @@
         <p:cNvPr id="1" name="">
           <a:extLst>
             <a:ext uri="{FF2B5EF4-FFF2-40B4-BE49-F238E27FC236}">
-              <a16:creationId xmlns:a16="http://schemas.microsoft.com/office/drawing/2014/main" id="{C820EC30-F3A8-AD19-F0F6-7494D0EB0BAF}"/>
+              <a16:creationId xmlns:a16="http://schemas.microsoft.com/office/drawing/2014/main" id="{07CE74FE-5A9F-B14F-AF9A-F47FCA61136E}"/>
             </a:ext>
           </a:extLst>
         </p:cNvPr>
@@ -10139,7 +9993,7 @@
           <p:cNvPr id="2" name="Titre 1">
             <a:extLst>
               <a:ext uri="{FF2B5EF4-FFF2-40B4-BE49-F238E27FC236}">
-                <a16:creationId xmlns:a16="http://schemas.microsoft.com/office/drawing/2014/main" id="{F0568D2D-75DF-D509-7331-3AA8773A1EA4}"/>
+                <a16:creationId xmlns:a16="http://schemas.microsoft.com/office/drawing/2014/main" id="{7DBA1E2B-599E-BFE5-FBA1-CF3020A446EC}"/>
               </a:ext>
             </a:extLst>
           </p:cNvPr>
@@ -10156,12 +10010,8 @@
           <a:lstStyle/>
           <a:p>
             <a:r>
-              <a:rPr lang="fr-BE" dirty="0"/>
-              <a:t>3.32 </a:t>
-            </a:r>
-            <a:r>
-              <a:rPr lang="en-GB" dirty="0"/>
-              <a:t>Combined seasonality tests [TODO]</a:t>
+              <a:rPr lang="en-GB" noProof="0" dirty="0"/>
+              <a:t>3.4 Residual trading days tests</a:t>
             </a:r>
           </a:p>
         </p:txBody>
@@ -10171,7 +10021,7 @@
           <p:cNvPr id="3" name="Espace réservé du contenu 2">
             <a:extLst>
               <a:ext uri="{FF2B5EF4-FFF2-40B4-BE49-F238E27FC236}">
-                <a16:creationId xmlns:a16="http://schemas.microsoft.com/office/drawing/2014/main" id="{930CB6EA-1876-09CD-612B-0FBAE167ACA5}"/>
+                <a16:creationId xmlns:a16="http://schemas.microsoft.com/office/drawing/2014/main" id="{8BDFCEF7-FAC6-F159-6182-9BD49584FF9B}"/>
               </a:ext>
             </a:extLst>
           </p:cNvPr>
@@ -10179,7 +10029,7 @@
             <a:spLocks noGrp="1"/>
           </p:cNvSpPr>
           <p:nvPr>
-            <p:ph idx="1"/>
+            <p:ph sz="half" idx="2"/>
           </p:nvPr>
         </p:nvSpPr>
         <p:spPr/>
@@ -10188,29 +10038,21 @@
           <a:lstStyle/>
           <a:p>
             <a:r>
-              <a:rPr lang="en-GB" dirty="0"/>
-              <a:t>X12-like</a:t>
+              <a:rPr lang="en-GB" sz="2400" noProof="0" dirty="0"/>
+              <a:t>Disabled for quarterly series, rather important for monthly series</a:t>
             </a:r>
           </a:p>
           <a:p>
             <a:r>
-              <a:rPr lang="en-GB" dirty="0"/>
-              <a:t>Seasonality tests on SA, I</a:t>
+              <a:rPr lang="en-GB" sz="2400" noProof="0" dirty="0"/>
+              <a:t>F-test on trading days variables </a:t>
             </a:r>
           </a:p>
           <a:p>
             <a:r>
-              <a:rPr lang="en-GB" dirty="0"/>
-              <a:t>Computed on the whole series</a:t>
+              <a:rPr lang="en-GB" sz="2400" noProof="0" dirty="0"/>
+              <a:t>On the SA series</a:t>
             </a:r>
-            <a:r>
-              <a:rPr lang="en-GB"/>
-              <a:t>, on the last 3 years </a:t>
-            </a:r>
-            <a:endParaRPr lang="en-GB" dirty="0"/>
-          </a:p>
-          <a:p>
-            <a:endParaRPr lang="en-GB" dirty="0"/>
           </a:p>
         </p:txBody>
       </p:sp>
@@ -10219,7 +10061,7 @@
           <p:cNvPr id="5" name="Espace réservé du pied de page 4">
             <a:extLst>
               <a:ext uri="{FF2B5EF4-FFF2-40B4-BE49-F238E27FC236}">
-                <a16:creationId xmlns:a16="http://schemas.microsoft.com/office/drawing/2014/main" id="{B8FD9569-D7DC-F367-60A2-A7CA549C2596}"/>
+                <a16:creationId xmlns:a16="http://schemas.microsoft.com/office/drawing/2014/main" id="{14F91BD4-A2AF-963F-829B-37CC4E9AB495}"/>
               </a:ext>
             </a:extLst>
           </p:cNvPr>
@@ -10227,16 +10069,21 @@
             <a:spLocks noGrp="1"/>
           </p:cNvSpPr>
           <p:nvPr>
-            <p:ph type="ftr" sz="quarter" idx="11"/>
+            <p:ph type="ftr" sz="quarter" idx="4294967295"/>
           </p:nvPr>
         </p:nvSpPr>
-        <p:spPr/>
+        <p:spPr>
+          <a:xfrm>
+            <a:off x="0" y="0"/>
+            <a:ext cx="0" cy="0"/>
+          </a:xfrm>
+        </p:spPr>
         <p:txBody>
           <a:bodyPr/>
           <a:lstStyle/>
           <a:p>
             <a:r>
-              <a:rPr lang="en-GB"/>
+              <a:rPr lang="en-GB" noProof="0" dirty="0"/>
               <a:t>Quality diagnostics</a:t>
             </a:r>
           </a:p>
@@ -10245,7 +10092,7 @@
     </p:spTree>
     <p:extLst>
       <p:ext uri="{BB962C8B-B14F-4D97-AF65-F5344CB8AC3E}">
-        <p14:creationId xmlns:p14="http://schemas.microsoft.com/office/powerpoint/2010/main" val="1506670019"/>
+        <p14:creationId xmlns:p14="http://schemas.microsoft.com/office/powerpoint/2010/main" val="3615481029"/>
       </p:ext>
     </p:extLst>
   </p:cSld>
@@ -11127,6 +10974,26 @@
 </file>
 
 <file path=customXml/item1.xml><?xml version="1.0" encoding="utf-8"?>
+<p:properties xmlns:p="http://schemas.microsoft.com/office/2006/metadata/properties" xmlns:xsi="http://www.w3.org/2001/XMLSchema-instance" xmlns:pc="http://schemas.microsoft.com/office/infopath/2007/PartnerControls">
+  <documentManagement>
+    <lcf76f155ced4ddcb4097134ff3c332f xmlns="0e422b70-e85d-4377-8ee0-b6227433d381">
+      <Terms xmlns="http://schemas.microsoft.com/office/infopath/2007/PartnerControls"/>
+    </lcf76f155ced4ddcb4097134ff3c332f>
+    <TaxCatchAll xmlns="199f642e-5af9-486c-ac06-f366742ef41a"/>
+  </documentManagement>
+</p:properties>
+</file>
+
+<file path=customXml/item2.xml><?xml version="1.0" encoding="utf-8"?>
+<?mso-contentType ?>
+<FormTemplates xmlns="http://schemas.microsoft.com/sharepoint/v3/contenttype/forms">
+  <Display>DocumentLibraryForm</Display>
+  <Edit>DocumentLibraryForm</Edit>
+  <New>DocumentLibraryForm</New>
+</FormTemplates>
+</file>
+
+<file path=customXml/item3.xml><?xml version="1.0" encoding="utf-8"?>
 <ct:contentTypeSchema xmlns:ct="http://schemas.microsoft.com/office/2006/metadata/contentType" xmlns:ma="http://schemas.microsoft.com/office/2006/metadata/properties/metaAttributes" ct:_="" ma:_="" ma:contentTypeName="Document" ma:contentTypeID="0x010100E6AA5C57F8EADE4E9CD6BB064C0C3195" ma:contentTypeVersion="16" ma:contentTypeDescription="Create a new document." ma:contentTypeScope="" ma:versionID="bb51c19a58f458ddcddd050a07659236">
   <xsd:schema xmlns:xsd="http://www.w3.org/2001/XMLSchema" xmlns:xs="http://www.w3.org/2001/XMLSchema" xmlns:p="http://schemas.microsoft.com/office/2006/metadata/properties" xmlns:ns2="0e422b70-e85d-4377-8ee0-b6227433d381" xmlns:ns3="199f642e-5af9-486c-ac06-f366742ef41a" targetNamespace="http://schemas.microsoft.com/office/2006/metadata/properties" ma:root="true" ma:fieldsID="0ee7a3bac0352a48a43420936abd968a" ns2:_="" ns3:_="">
     <xsd:import namespace="0e422b70-e85d-4377-8ee0-b6227433d381"/>
@@ -11367,27 +11234,32 @@
 </ct:contentTypeSchema>
 </file>
 
-<file path=customXml/item2.xml><?xml version="1.0" encoding="utf-8"?>
-<?mso-contentType ?>
-<FormTemplates xmlns="http://schemas.microsoft.com/sharepoint/v3/contenttype/forms">
-  <Display>DocumentLibraryForm</Display>
-  <Edit>DocumentLibraryForm</Edit>
-  <New>DocumentLibraryForm</New>
-</FormTemplates>
+<file path=customXml/itemProps1.xml><?xml version="1.0" encoding="utf-8"?>
+<ds:datastoreItem xmlns:ds="http://schemas.openxmlformats.org/officeDocument/2006/customXml" ds:itemID="{2D6C293B-B8B4-4284-A17E-9F9E4C32B25A}">
+  <ds:schemaRefs>
+    <ds:schemaRef ds:uri="http://schemas.microsoft.com/office/2006/documentManagement/types"/>
+    <ds:schemaRef ds:uri="http://purl.org/dc/elements/1.1/"/>
+    <ds:schemaRef ds:uri="http://purl.org/dc/terms/"/>
+    <ds:schemaRef ds:uri="http://purl.org/dc/dcmitype/"/>
+    <ds:schemaRef ds:uri="0e422b70-e85d-4377-8ee0-b6227433d381"/>
+    <ds:schemaRef ds:uri="http://schemas.microsoft.com/office/infopath/2007/PartnerControls"/>
+    <ds:schemaRef ds:uri="199f642e-5af9-486c-ac06-f366742ef41a"/>
+    <ds:schemaRef ds:uri="http://schemas.openxmlformats.org/package/2006/metadata/core-properties"/>
+    <ds:schemaRef ds:uri="http://schemas.microsoft.com/office/2006/metadata/properties"/>
+    <ds:schemaRef ds:uri="http://www.w3.org/XML/1998/namespace"/>
+  </ds:schemaRefs>
+</ds:datastoreItem>
 </file>
 
-<file path=customXml/item3.xml><?xml version="1.0" encoding="utf-8"?>
-<p:properties xmlns:p="http://schemas.microsoft.com/office/2006/metadata/properties" xmlns:xsi="http://www.w3.org/2001/XMLSchema-instance" xmlns:pc="http://schemas.microsoft.com/office/infopath/2007/PartnerControls">
-  <documentManagement>
-    <lcf76f155ced4ddcb4097134ff3c332f xmlns="0e422b70-e85d-4377-8ee0-b6227433d381">
-      <Terms xmlns="http://schemas.microsoft.com/office/infopath/2007/PartnerControls"/>
-    </lcf76f155ced4ddcb4097134ff3c332f>
-    <TaxCatchAll xmlns="199f642e-5af9-486c-ac06-f366742ef41a"/>
-  </documentManagement>
-</p:properties>
+<file path=customXml/itemProps2.xml><?xml version="1.0" encoding="utf-8"?>
+<ds:datastoreItem xmlns:ds="http://schemas.openxmlformats.org/officeDocument/2006/customXml" ds:itemID="{67DD9E9F-9EEB-4105-B29B-819486C2855A}">
+  <ds:schemaRefs>
+    <ds:schemaRef ds:uri="http://schemas.microsoft.com/sharepoint/v3/contenttype/forms"/>
+  </ds:schemaRefs>
+</ds:datastoreItem>
 </file>
 
-<file path=customXml/itemProps1.xml><?xml version="1.0" encoding="utf-8"?>
+<file path=customXml/itemProps3.xml><?xml version="1.0" encoding="utf-8"?>
 <ds:datastoreItem xmlns:ds="http://schemas.openxmlformats.org/officeDocument/2006/customXml" ds:itemID="{04B464EA-1576-49DD-9675-1E3399D4D196}">
   <ds:schemaRefs>
     <ds:schemaRef ds:uri="http://schemas.microsoft.com/office/2006/metadata/contentType"/>
@@ -11404,29 +11276,4 @@
     <ds:schemaRef ds:uri="http://schemas.microsoft.com/internal/obd"/>
   </ds:schemaRefs>
 </ds:datastoreItem>
-</file>
-
-<file path=customXml/itemProps2.xml><?xml version="1.0" encoding="utf-8"?>
-<ds:datastoreItem xmlns:ds="http://schemas.openxmlformats.org/officeDocument/2006/customXml" ds:itemID="{67DD9E9F-9EEB-4105-B29B-819486C2855A}">
-  <ds:schemaRefs>
-    <ds:schemaRef ds:uri="http://schemas.microsoft.com/sharepoint/v3/contenttype/forms"/>
-  </ds:schemaRefs>
-</ds:datastoreItem>
-</file>
-
-<file path=customXml/itemProps3.xml><?xml version="1.0" encoding="utf-8"?>
-<ds:datastoreItem xmlns:ds="http://schemas.openxmlformats.org/officeDocument/2006/customXml" ds:itemID="{2D6C293B-B8B4-4284-A17E-9F9E4C32B25A}">
-  <ds:schemaRefs>
-    <ds:schemaRef ds:uri="http://schemas.microsoft.com/office/2006/documentManagement/types"/>
-    <ds:schemaRef ds:uri="http://purl.org/dc/elements/1.1/"/>
-    <ds:schemaRef ds:uri="http://purl.org/dc/terms/"/>
-    <ds:schemaRef ds:uri="http://purl.org/dc/dcmitype/"/>
-    <ds:schemaRef ds:uri="0e422b70-e85d-4377-8ee0-b6227433d381"/>
-    <ds:schemaRef ds:uri="http://schemas.microsoft.com/office/infopath/2007/PartnerControls"/>
-    <ds:schemaRef ds:uri="199f642e-5af9-486c-ac06-f366742ef41a"/>
-    <ds:schemaRef ds:uri="http://schemas.openxmlformats.org/package/2006/metadata/core-properties"/>
-    <ds:schemaRef ds:uri="http://schemas.microsoft.com/office/2006/metadata/properties"/>
-    <ds:schemaRef ds:uri="http://www.w3.org/XML/1998/namespace"/>
-  </ds:schemaRefs>
-</ds:datastoreItem>
 </file>
--- a/5.1 Quality.pptx
+++ b/5.1 Quality.pptx
@@ -277,7 +277,7 @@
       <p15:notesGuideLst xmlns:p15="http://schemas.microsoft.com/office/powerpoint/2012/main"/>
     </p:ext>
     <p:ext uri="http://customooxmlschemas.google.com/">
-      <go:slidesCustomData xmlns="" xmlns:go="http://customooxmlschemas.google.com/" xmlns:ahyp="http://schemas.microsoft.com/office/drawing/2018/hyperlinkcolor" xmlns:p15="http://schemas.microsoft.com/office/powerpoint/2012/main" xmlns:p14="http://schemas.microsoft.com/office/powerpoint/2010/main" xmlns:com="http://schemas.openxmlformats.org/drawingml/2006/compatibility" xmlns:pvml="urn:schemas-microsoft-com:office:powerpoint" xmlns:v="urn:schemas-microsoft-com:vml" xmlns:o="urn:schemas-microsoft-com:office:office" xmlns:dgm="http://schemas.openxmlformats.org/drawingml/2006/diagram" xmlns:c="http://schemas.openxmlformats.org/drawingml/2006/chart" xmlns:mv="urn:schemas-microsoft-com:mac:vml" xmlns:mc="http://schemas.openxmlformats.org/markup-compatibility/2006" r:id="rId59" roundtripDataSignature="AMtx7mh3YP3xexYcFoahXa2ehi0H5V4Zaw=="/>
+      <go:slidesCustomData xmlns:mc="http://schemas.openxmlformats.org/markup-compatibility/2006" xmlns:mv="urn:schemas-microsoft-com:mac:vml" xmlns:c="http://schemas.openxmlformats.org/drawingml/2006/chart" xmlns:dgm="http://schemas.openxmlformats.org/drawingml/2006/diagram" xmlns:o="urn:schemas-microsoft-com:office:office" xmlns:v="urn:schemas-microsoft-com:vml" xmlns:pvml="urn:schemas-microsoft-com:office:powerpoint" xmlns:com="http://schemas.openxmlformats.org/drawingml/2006/compatibility" xmlns:p14="http://schemas.microsoft.com/office/powerpoint/2010/main" xmlns:p15="http://schemas.microsoft.com/office/powerpoint/2012/main" xmlns:ahyp="http://schemas.microsoft.com/office/drawing/2018/hyperlinkcolor" xmlns:go="http://customooxmlschemas.google.com/" xmlns="" r:id="rId59" roundtripDataSignature="AMtx7mh3YP3xexYcFoahXa2ehi0H5V4Zaw=="/>
     </p:ext>
   </p:extLst>
 </p:presentation>
@@ -385,7 +385,7 @@
           <a:p>
             <a:fld id="{0CBFB8CE-488C-4A7E-87F2-3AF6127C51C1}" type="datetimeFigureOut">
               <a:rPr lang="en-IE" smtClean="0"/>
-              <a:t>28/09/2026</a:t>
+              <a:t>01/10/2026</a:t>
             </a:fld>
             <a:endParaRPr lang="en-IE"/>
           </a:p>
@@ -6247,8 +6247,12 @@
           <a:lstStyle/>
           <a:p>
             <a:r>
+              <a:rPr lang="en-GB" noProof="0"/>
+              <a:t>5 Quality </a:t>
+            </a:r>
+            <a:r>
               <a:rPr lang="en-GB" noProof="0" dirty="0"/>
-              <a:t>Quality diagnostics in JD+</a:t>
+              <a:t>diagnostics in JD+</a:t>
             </a:r>
           </a:p>
         </p:txBody>
@@ -9216,8 +9220,8 @@
           </a:p>
         </p:txBody>
       </p:sp>
-      <mc:AlternateContent xmlns:mc="http://schemas.openxmlformats.org/markup-compatibility/2006">
-        <mc:Choice xmlns:a14="http://schemas.microsoft.com/office/drawing/2010/main" Requires="a14">
+      <mc:AlternateContent xmlns:mc="http://schemas.openxmlformats.org/markup-compatibility/2006" xmlns:a14="http://schemas.microsoft.com/office/drawing/2010/main">
+        <mc:Choice Requires="a14">
           <p:sp>
             <p:nvSpPr>
               <p:cNvPr id="13" name="Espace réservé du contenu 12">
@@ -9402,7 +9406,7 @@
             </p:txBody>
           </p:sp>
         </mc:Choice>
-        <mc:Fallback>
+        <mc:Fallback xmlns="">
           <p:sp>
             <p:nvSpPr>
               <p:cNvPr id="13" name="Espace réservé du contenu 12">
@@ -10974,6 +10978,15 @@
 </file>
 
 <file path=customXml/item1.xml><?xml version="1.0" encoding="utf-8"?>
+<?mso-contentType ?>
+<FormTemplates xmlns="http://schemas.microsoft.com/sharepoint/v3/contenttype/forms">
+  <Display>DocumentLibraryForm</Display>
+  <Edit>DocumentLibraryForm</Edit>
+  <New>DocumentLibraryForm</New>
+</FormTemplates>
+</file>
+
+<file path=customXml/item2.xml><?xml version="1.0" encoding="utf-8"?>
 <p:properties xmlns:p="http://schemas.microsoft.com/office/2006/metadata/properties" xmlns:xsi="http://www.w3.org/2001/XMLSchema-instance" xmlns:pc="http://schemas.microsoft.com/office/infopath/2007/PartnerControls">
   <documentManagement>
     <lcf76f155ced4ddcb4097134ff3c332f xmlns="0e422b70-e85d-4377-8ee0-b6227433d381">
@@ -10982,15 +10995,6 @@
     <TaxCatchAll xmlns="199f642e-5af9-486c-ac06-f366742ef41a"/>
   </documentManagement>
 </p:properties>
-</file>
-
-<file path=customXml/item2.xml><?xml version="1.0" encoding="utf-8"?>
-<?mso-contentType ?>
-<FormTemplates xmlns="http://schemas.microsoft.com/sharepoint/v3/contenttype/forms">
-  <Display>DocumentLibraryForm</Display>
-  <Edit>DocumentLibraryForm</Edit>
-  <New>DocumentLibraryForm</New>
-</FormTemplates>
 </file>
 
 <file path=customXml/item3.xml><?xml version="1.0" encoding="utf-8"?>
@@ -11235,6 +11239,14 @@
 </file>
 
 <file path=customXml/itemProps1.xml><?xml version="1.0" encoding="utf-8"?>
+<ds:datastoreItem xmlns:ds="http://schemas.openxmlformats.org/officeDocument/2006/customXml" ds:itemID="{67DD9E9F-9EEB-4105-B29B-819486C2855A}">
+  <ds:schemaRefs>
+    <ds:schemaRef ds:uri="http://schemas.microsoft.com/sharepoint/v3/contenttype/forms"/>
+  </ds:schemaRefs>
+</ds:datastoreItem>
+</file>
+
+<file path=customXml/itemProps2.xml><?xml version="1.0" encoding="utf-8"?>
 <ds:datastoreItem xmlns:ds="http://schemas.openxmlformats.org/officeDocument/2006/customXml" ds:itemID="{2D6C293B-B8B4-4284-A17E-9F9E4C32B25A}">
   <ds:schemaRefs>
     <ds:schemaRef ds:uri="http://schemas.microsoft.com/office/2006/documentManagement/types"/>
@@ -11247,14 +11259,6 @@
     <ds:schemaRef ds:uri="http://schemas.openxmlformats.org/package/2006/metadata/core-properties"/>
     <ds:schemaRef ds:uri="http://schemas.microsoft.com/office/2006/metadata/properties"/>
     <ds:schemaRef ds:uri="http://www.w3.org/XML/1998/namespace"/>
-  </ds:schemaRefs>
-</ds:datastoreItem>
-</file>
-
-<file path=customXml/itemProps2.xml><?xml version="1.0" encoding="utf-8"?>
-<ds:datastoreItem xmlns:ds="http://schemas.openxmlformats.org/officeDocument/2006/customXml" ds:itemID="{67DD9E9F-9EEB-4105-B29B-819486C2855A}">
-  <ds:schemaRefs>
-    <ds:schemaRef ds:uri="http://schemas.microsoft.com/sharepoint/v3/contenttype/forms"/>
   </ds:schemaRefs>
 </ds:datastoreItem>
 </file>
